--- a/docs/content/glm_logistic_regression/glm_logistic_regression_lecture.pptx
+++ b/docs/content/glm_logistic_regression/glm_logistic_regression_lecture.pptx
@@ -11557,7 +11557,7 @@
             </a:pPr>
             <a:r>
               <a:rPr sz="2000"/>
-              <a:t>Our findings suggest that vegetation structure, as measured by shrub cover, plays a crucial role in determining the presence of native rodents in canyon fragments. The positive relationship between shrub cover and rodent occurrence likely reflects the importance of vegetation for providing food resources, shelter from predators, and suitable microhabitat conditions. Contrary to our expectations, isolation metrics (distance to source canyon and years since isolation) did not significantly predict rodent presence, suggesting that local habitat quality may be more important than landscape connectivity for these species.</a:t>
+              <a:t>Our findings suggest that vegetation structure, as measured by shrub cover, is a strong predictor of native rodent presence in canyon fragments. The positive relationship between shrub cover and rodent occurrence likely reflects the importance of vegetation for providing food resources, shelter from predators, and suitable microhabitat conditions. Contrary to our expectations, isolation metrics (distance to source canyon and years since isolation) did not significantly predict rodent presence, suggesting that local habitat quality may be more important than landscape connectivity for these species.</a:t>
             </a:r>
           </a:p>
         </p:txBody>
